--- a/アプリ仕様書.pptx
+++ b/アプリ仕様書.pptx
@@ -12,8 +12,8 @@
     <p:sldId id="267" r:id="rId6"/>
     <p:sldId id="268" r:id="rId7"/>
     <p:sldId id="269" r:id="rId8"/>
-    <p:sldId id="258" r:id="rId9"/>
-    <p:sldId id="259" r:id="rId10"/>
+    <p:sldId id="259" r:id="rId9"/>
+    <p:sldId id="258" r:id="rId10"/>
     <p:sldId id="260" r:id="rId11"/>
     <p:sldId id="261" r:id="rId12"/>
     <p:sldId id="262" r:id="rId13"/>
@@ -3971,6 +3971,47 @@
           <a:bodyPr/>
           <a:lstStyle/>
           <a:p>
+            <a:r>
+              <a:rPr kumimoji="1" lang="ja-JP" altLang="en-US" dirty="0"/>
+              <a:t>参考</a:t>
+            </a:r>
+            <a:r>
+              <a:rPr kumimoji="1" lang="en-US" altLang="ja-JP" dirty="0"/>
+              <a:t>URL</a:t>
+            </a:r>
+            <a:br>
+              <a:rPr kumimoji="1" lang="en-US" altLang="ja-JP" dirty="0"/>
+            </a:br>
+            <a:r>
+              <a:rPr lang="en-US" altLang="ja-JP" dirty="0">
+                <a:hlinkClick r:id="rId2"/>
+              </a:rPr>
+              <a:t>【</a:t>
+            </a:r>
+            <a:r>
+              <a:rPr lang="en-US" altLang="ja-JP" dirty="0" err="1">
+                <a:hlinkClick r:id="rId2"/>
+              </a:rPr>
+              <a:t>Flutter】Google</a:t>
+            </a:r>
+            <a:r>
+              <a:rPr lang="ja-JP" altLang="en-US" dirty="0">
+                <a:hlinkClick r:id="rId2"/>
+              </a:rPr>
+              <a:t>認証（ログイン／サインイン）の実装 </a:t>
+            </a:r>
+            <a:r>
+              <a:rPr lang="en-US" altLang="ja-JP" dirty="0">
+                <a:hlinkClick r:id="rId2"/>
+              </a:rPr>
+              <a:t>#iOS - </a:t>
+            </a:r>
+            <a:r>
+              <a:rPr lang="en-US" altLang="ja-JP" dirty="0" err="1">
+                <a:hlinkClick r:id="rId2"/>
+              </a:rPr>
+              <a:t>Qiita</a:t>
+            </a:r>
             <a:endParaRPr kumimoji="1" lang="ja-JP" altLang="en-US" dirty="0"/>
           </a:p>
         </p:txBody>
@@ -6067,6 +6108,22 @@
           <a:bodyPr/>
           <a:lstStyle/>
           <a:p>
+            <a:r>
+              <a:rPr kumimoji="1" lang="en-US" altLang="ja-JP" dirty="0"/>
+              <a:t>Firebase</a:t>
+            </a:r>
+            <a:r>
+              <a:rPr lang="ja-JP" altLang="en-US" dirty="0"/>
+              <a:t>と</a:t>
+            </a:r>
+            <a:r>
+              <a:rPr lang="en-US" altLang="ja-JP" dirty="0" err="1"/>
+              <a:t>googlemaps</a:t>
+            </a:r>
+            <a:r>
+              <a:rPr lang="ja-JP" altLang="en-US" dirty="0"/>
+              <a:t>などの</a:t>
+            </a:r>
             <a:endParaRPr kumimoji="1" lang="ja-JP" altLang="en-US" dirty="0"/>
           </a:p>
         </p:txBody>
@@ -6106,7 +6163,7 @@
           <p:cNvPr id="2" name="タイトル 1">
             <a:extLst>
               <a:ext uri="{FF2B5EF4-FFF2-40B4-BE49-F238E27FC236}">
-                <a16:creationId xmlns:a16="http://schemas.microsoft.com/office/drawing/2014/main" id="{E7A30001-CDB8-5E81-7EC2-2B64F49ADD6E}"/>
+                <a16:creationId xmlns:a16="http://schemas.microsoft.com/office/drawing/2014/main" id="{1D17A5C7-9155-FA27-F3F7-18958F93F3DD}"/>
               </a:ext>
             </a:extLst>
           </p:cNvPr>
@@ -6124,15 +6181,7 @@
           <a:p>
             <a:r>
               <a:rPr kumimoji="1" lang="ja-JP" altLang="en-US" dirty="0"/>
-              <a:t>写真の</a:t>
-            </a:r>
-            <a:r>
-              <a:rPr kumimoji="1" lang="en-US" altLang="ja-JP" dirty="0"/>
-              <a:t>crud</a:t>
-            </a:r>
-            <a:r>
-              <a:rPr kumimoji="1" lang="ja-JP" altLang="en-US" dirty="0"/>
-              <a:t>処理</a:t>
+              <a:t>地図の表示</a:t>
             </a:r>
           </a:p>
         </p:txBody>
@@ -6142,7 +6191,7 @@
           <p:cNvPr id="3" name="コンテンツ プレースホルダー 2">
             <a:extLst>
               <a:ext uri="{FF2B5EF4-FFF2-40B4-BE49-F238E27FC236}">
-                <a16:creationId xmlns:a16="http://schemas.microsoft.com/office/drawing/2014/main" id="{2902CCC9-0010-08ED-C3E6-104D736867F2}"/>
+                <a16:creationId xmlns:a16="http://schemas.microsoft.com/office/drawing/2014/main" id="{D585B3DF-E042-886C-C086-42D30AE34F70}"/>
               </a:ext>
             </a:extLst>
           </p:cNvPr>
@@ -6158,6 +6207,47 @@
           <a:bodyPr/>
           <a:lstStyle/>
           <a:p>
+            <a:r>
+              <a:rPr lang="ja-JP" altLang="en-US" dirty="0"/>
+              <a:t>参考</a:t>
+            </a:r>
+            <a:r>
+              <a:rPr lang="en-US" altLang="ja-JP" dirty="0"/>
+              <a:t>URL</a:t>
+            </a:r>
+            <a:br>
+              <a:rPr lang="en-US" altLang="ja-JP" dirty="0"/>
+            </a:br>
+            <a:r>
+              <a:rPr lang="en-US" altLang="ja-JP" dirty="0">
+                <a:hlinkClick r:id="rId2"/>
+              </a:rPr>
+              <a:t>【Flutter/</a:t>
+            </a:r>
+            <a:r>
+              <a:rPr lang="en-US" altLang="ja-JP" dirty="0" err="1">
+                <a:hlinkClick r:id="rId2"/>
+              </a:rPr>
+              <a:t>Dart】Google</a:t>
+            </a:r>
+            <a:r>
+              <a:rPr lang="ja-JP" altLang="en-US" dirty="0">
+                <a:hlinkClick r:id="rId2"/>
+              </a:rPr>
+              <a:t>地図アプリを作ろう </a:t>
+            </a:r>
+            <a:r>
+              <a:rPr lang="en-US" altLang="ja-JP" dirty="0">
+                <a:hlinkClick r:id="rId2"/>
+              </a:rPr>
+              <a:t>#AndroidStudio - </a:t>
+            </a:r>
+            <a:r>
+              <a:rPr lang="en-US" altLang="ja-JP" dirty="0" err="1">
+                <a:hlinkClick r:id="rId2"/>
+              </a:rPr>
+              <a:t>Qiita</a:t>
+            </a:r>
             <a:endParaRPr kumimoji="1" lang="ja-JP" altLang="en-US" dirty="0"/>
           </a:p>
         </p:txBody>
@@ -6165,7 +6255,7 @@
     </p:spTree>
     <p:extLst>
       <p:ext uri="{BB962C8B-B14F-4D97-AF65-F5344CB8AC3E}">
-        <p14:creationId xmlns:p14="http://schemas.microsoft.com/office/powerpoint/2010/main" val="422807821"/>
+        <p14:creationId xmlns:p14="http://schemas.microsoft.com/office/powerpoint/2010/main" val="1634657717"/>
       </p:ext>
     </p:extLst>
   </p:cSld>
@@ -6197,7 +6287,7 @@
           <p:cNvPr id="2" name="タイトル 1">
             <a:extLst>
               <a:ext uri="{FF2B5EF4-FFF2-40B4-BE49-F238E27FC236}">
-                <a16:creationId xmlns:a16="http://schemas.microsoft.com/office/drawing/2014/main" id="{1D17A5C7-9155-FA27-F3F7-18958F93F3DD}"/>
+                <a16:creationId xmlns:a16="http://schemas.microsoft.com/office/drawing/2014/main" id="{E7A30001-CDB8-5E81-7EC2-2B64F49ADD6E}"/>
               </a:ext>
             </a:extLst>
           </p:cNvPr>
@@ -6215,7 +6305,15 @@
           <a:p>
             <a:r>
               <a:rPr kumimoji="1" lang="ja-JP" altLang="en-US" dirty="0"/>
-              <a:t>地図の表示</a:t>
+              <a:t>写真の</a:t>
+            </a:r>
+            <a:r>
+              <a:rPr kumimoji="1" lang="en-US" altLang="ja-JP" dirty="0"/>
+              <a:t>crud</a:t>
+            </a:r>
+            <a:r>
+              <a:rPr kumimoji="1" lang="ja-JP" altLang="en-US" dirty="0"/>
+              <a:t>処理</a:t>
             </a:r>
           </a:p>
         </p:txBody>
@@ -6225,7 +6323,7 @@
           <p:cNvPr id="3" name="コンテンツ プレースホルダー 2">
             <a:extLst>
               <a:ext uri="{FF2B5EF4-FFF2-40B4-BE49-F238E27FC236}">
-                <a16:creationId xmlns:a16="http://schemas.microsoft.com/office/drawing/2014/main" id="{D585B3DF-E042-886C-C086-42D30AE34F70}"/>
+                <a16:creationId xmlns:a16="http://schemas.microsoft.com/office/drawing/2014/main" id="{2902CCC9-0010-08ED-C3E6-104D736867F2}"/>
               </a:ext>
             </a:extLst>
           </p:cNvPr>
@@ -6241,14 +6339,69 @@
           <a:bodyPr/>
           <a:lstStyle/>
           <a:p>
-            <a:endParaRPr kumimoji="1" lang="ja-JP" altLang="en-US"/>
+            <a:r>
+              <a:rPr kumimoji="1" lang="ja-JP" altLang="en-US" dirty="0"/>
+              <a:t>参考</a:t>
+            </a:r>
+            <a:r>
+              <a:rPr kumimoji="1" lang="en-US" altLang="ja-JP" dirty="0"/>
+              <a:t>URL</a:t>
+            </a:r>
+          </a:p>
+          <a:p>
+            <a:pPr marL="0" indent="0">
+              <a:buNone/>
+            </a:pPr>
+            <a:r>
+              <a:rPr lang="ja-JP" altLang="en-US" dirty="0">
+                <a:hlinkClick r:id="rId2"/>
+              </a:rPr>
+              <a:t>　</a:t>
+            </a:r>
+            <a:r>
+              <a:rPr lang="en-US" altLang="ja-JP" dirty="0">
+                <a:hlinkClick r:id="rId2"/>
+              </a:rPr>
+              <a:t>Flutter</a:t>
+            </a:r>
+            <a:r>
+              <a:rPr lang="ja-JP" altLang="en-US" dirty="0">
+                <a:hlinkClick r:id="rId2"/>
+              </a:rPr>
+              <a:t>で画像をアルバムに保存する </a:t>
+            </a:r>
+            <a:r>
+              <a:rPr lang="en-US" altLang="ja-JP" dirty="0">
+                <a:hlinkClick r:id="rId2"/>
+              </a:rPr>
+              <a:t>#</a:t>
+            </a:r>
+            <a:r>
+              <a:rPr lang="ja-JP" altLang="en-US" dirty="0">
+                <a:hlinkClick r:id="rId2"/>
+              </a:rPr>
+              <a:t>画像保存 </a:t>
+            </a:r>
+            <a:r>
+              <a:rPr lang="en-US" altLang="ja-JP" dirty="0">
+                <a:hlinkClick r:id="rId2"/>
+              </a:rPr>
+              <a:t>- </a:t>
+            </a:r>
+            <a:r>
+              <a:rPr lang="en-US" altLang="ja-JP" dirty="0" err="1">
+                <a:hlinkClick r:id="rId2"/>
+              </a:rPr>
+              <a:t>Qiita</a:t>
+            </a:r>
+            <a:endParaRPr kumimoji="1" lang="ja-JP" altLang="en-US" dirty="0"/>
           </a:p>
         </p:txBody>
       </p:sp>
     </p:spTree>
     <p:extLst>
       <p:ext uri="{BB962C8B-B14F-4D97-AF65-F5344CB8AC3E}">
-        <p14:creationId xmlns:p14="http://schemas.microsoft.com/office/powerpoint/2010/main" val="1634657717"/>
+        <p14:creationId xmlns:p14="http://schemas.microsoft.com/office/powerpoint/2010/main" val="422807821"/>
       </p:ext>
     </p:extLst>
   </p:cSld>
